--- a/presentations/miniops/MiniOps_Management_EN.pptx
+++ b/presentations/miniops/MiniOps_Management_EN.pptx
@@ -4218,7 +4218,7 @@
                 </a:solidFill>
                 <a:latin typeface="Aptos"/>
               </a:rPr>
-              <a:t>MiniOps management presentation | 10 minutes | editable bilingual deliverables</a:t>
+              <a:t>MiniOps management presentation — 10 minutes — editable bilingual deliverables</a:t>
             </a:r>
           </a:p>
         </p:txBody>
@@ -4303,7 +4303,7 @@
                 </a:solidFill>
                 <a:latin typeface="Aptos"/>
               </a:rPr>
-              <a:t>Ray Liu | September 2026</a:t>
+              <a:t>Ray Liu · September 2026</a:t>
             </a:r>
           </a:p>
         </p:txBody>
@@ -5477,7 +5477,7 @@
                 </a:solidFill>
                 <a:latin typeface="Aptos"/>
               </a:rPr>
-              <a:t>Ray Liu | September 2026</a:t>
+              <a:t>Ray Liu · September 2026</a:t>
             </a:r>
           </a:p>
         </p:txBody>
@@ -6460,7 +6460,7 @@
                 </a:solidFill>
                 <a:latin typeface="Aptos"/>
               </a:rPr>
-              <a:t>Ray Liu | September 2026</a:t>
+              <a:t>Ray Liu · September 2026</a:t>
             </a:r>
           </a:p>
         </p:txBody>
@@ -7547,7 +7547,7 @@
                 </a:solidFill>
                 <a:latin typeface="Aptos"/>
               </a:rPr>
-              <a:t>Ray Liu | September 2026</a:t>
+              <a:t>Ray Liu · September 2026</a:t>
             </a:r>
           </a:p>
         </p:txBody>
@@ -8530,7 +8530,7 @@
                 </a:solidFill>
                 <a:latin typeface="Aptos"/>
               </a:rPr>
-              <a:t>Ray Liu | September 2026</a:t>
+              <a:t>Ray Liu · September 2026</a:t>
             </a:r>
           </a:p>
         </p:txBody>
@@ -9322,7 +9322,7 @@
                 </a:solidFill>
                 <a:latin typeface="Aptos"/>
               </a:rPr>
-              <a:t>Ray Liu | September 2026</a:t>
+              <a:t>Ray Liu · September 2026</a:t>
             </a:r>
           </a:p>
         </p:txBody>

--- a/presentations/miniops/MiniOps_Management_EN.pptx
+++ b/presentations/miniops/MiniOps_Management_EN.pptx
@@ -4174,7 +4174,7 @@
                 <a:solidFill>
                   <a:srgbClr val="FFFFFF"/>
                 </a:solidFill>
-                <a:latin typeface="Aptos"/>
+                <a:latin typeface="Liberation Sans"/>
               </a:rPr>
               <a:t>Test Engineering Automation: Deliverables and Business Value</a:t>
             </a:r>
@@ -4216,7 +4216,7 @@
                 <a:solidFill>
                   <a:srgbClr val="DCE9F7"/>
                 </a:solidFill>
-                <a:latin typeface="Aptos"/>
+                <a:latin typeface="Liberation Sans"/>
               </a:rPr>
               <a:t>MiniOps management presentation — 10 minutes — editable bilingual deliverables</a:t>
             </a:r>
@@ -4301,7 +4301,7 @@
                 <a:solidFill>
                   <a:srgbClr val="5A6573"/>
                 </a:solidFill>
-                <a:latin typeface="Aptos"/>
+                <a:latin typeface="Liberation Sans"/>
               </a:rPr>
               <a:t>Ray Liu · September 2026</a:t>
             </a:r>
@@ -4343,7 +4343,7 @@
                 <a:solidFill>
                   <a:srgbClr val="5A6573"/>
                 </a:solidFill>
-                <a:latin typeface="Aptos"/>
+                <a:latin typeface="Liberation Sans"/>
               </a:rPr>
               <a:t>1</a:t>
             </a:r>
@@ -4430,7 +4430,7 @@
                 <a:solidFill>
                   <a:srgbClr val="092540"/>
                 </a:solidFill>
-                <a:latin typeface="Aptos"/>
+                <a:latin typeface="Liberation Sans"/>
               </a:rPr>
               <a:t>Four tools are delivered; the next step is to validate team-level value rather than claim benefit numbers early.</a:t>
             </a:r>
@@ -4560,7 +4560,7 @@
                 <a:solidFill>
                   <a:srgbClr val="092540"/>
                 </a:solidFill>
-                <a:latin typeface="Aptos"/>
+                <a:latin typeface="Liberation Sans"/>
               </a:rPr>
               <a:t>Visual configuration generation</a:t>
             </a:r>
@@ -4602,7 +4602,7 @@
                 <a:solidFill>
                   <a:srgbClr val="1E293B"/>
                 </a:solidFill>
-                <a:latin typeface="Aptos"/>
+                <a:latin typeface="Liberation Sans"/>
               </a:rPr>
               <a:t>PCAR3 Web UI generates Python configuration</a:t>
             </a:r>
@@ -4621,7 +4621,7 @@
                 <a:solidFill>
                   <a:srgbClr val="1E293B"/>
                 </a:solidFill>
-                <a:latin typeface="Aptos"/>
+                <a:latin typeface="Liberation Sans"/>
               </a:rPr>
               <a:t>Supports multiple PLBs, Loop Partition, and conditional structures</a:t>
             </a:r>
@@ -4751,7 +4751,7 @@
                 <a:solidFill>
                   <a:srgbClr val="092540"/>
                 </a:solidFill>
-                <a:latin typeface="Aptos"/>
+                <a:latin typeface="Liberation Sans"/>
               </a:rPr>
               <a:t>Natural language / build assistance</a:t>
             </a:r>
@@ -4793,7 +4793,7 @@
                 <a:solidFill>
                   <a:srgbClr val="1E293B"/>
                 </a:solidFill>
-                <a:latin typeface="Aptos"/>
+                <a:latin typeface="Liberation Sans"/>
               </a:rPr>
               <a:t>Copilot Skill generates .pcar</a:t>
             </a:r>
@@ -4812,7 +4812,7 @@
                 <a:solidFill>
                   <a:srgbClr val="1E293B"/>
                 </a:solidFill>
-                <a:latin typeface="Aptos"/>
+                <a:latin typeface="Liberation Sans"/>
               </a:rPr>
               <a:t>Can optionally resolve patterns, submit builds, and verify real Pat output</a:t>
             </a:r>
@@ -4942,7 +4942,7 @@
                 <a:solidFill>
                   <a:srgbClr val="092540"/>
                 </a:solidFill>
-                <a:latin typeface="Aptos"/>
+                <a:latin typeface="Liberation Sans"/>
               </a:rPr>
               <a:t>DVS preprocessing</a:t>
             </a:r>
@@ -4984,7 +4984,7 @@
                 <a:solidFill>
                   <a:srgbClr val="1E293B"/>
                 </a:solidFill>
-                <a:latin typeface="Aptos"/>
+                <a:latin typeface="Liberation Sans"/>
               </a:rPr>
               <a:t>CLI / Skill expands 16 trigger blocks</a:t>
             </a:r>
@@ -5003,7 +5003,7 @@
                 <a:solidFill>
                   <a:srgbClr val="1E293B"/>
                 </a:solidFill>
-                <a:latin typeface="Aptos"/>
+                <a:latin typeface="Liberation Sans"/>
               </a:rPr>
               <a:t>Supports CCD / IOD / DRD while preserving source files</a:t>
             </a:r>
@@ -5133,7 +5133,7 @@
                 <a:solidFill>
                   <a:srgbClr val="092540"/>
                 </a:solidFill>
-                <a:latin typeface="Aptos"/>
+                <a:latin typeface="Liberation Sans"/>
               </a:rPr>
               <a:t>Scan pin checking</a:t>
             </a:r>
@@ -5175,7 +5175,7 @@
                 <a:solidFill>
                   <a:srgbClr val="1E293B"/>
                 </a:solidFill>
-                <a:latin typeface="Aptos"/>
+                <a:latin typeface="Liberation Sans"/>
               </a:rPr>
               <a:t>Read-only extraction of ScanIn / ScanOut</a:t>
             </a:r>
@@ -5194,7 +5194,7 @@
                 <a:solidFill>
                   <a:srgbClr val="1E293B"/>
                 </a:solidFill>
-                <a:latin typeface="Aptos"/>
+                <a:latin typeface="Liberation Sans"/>
               </a:rPr>
               <a:t>Produces traceable JSON output for human review</a:t>
             </a:r>
@@ -5348,7 +5348,7 @@
                 <a:solidFill>
                   <a:srgbClr val="FFFFFF"/>
                 </a:solidFill>
-                <a:latin typeface="Aptos"/>
+                <a:latin typeface="Liberation Sans"/>
               </a:rPr>
               <a:t>Problems Addressed</a:t>
             </a:r>
@@ -5390,7 +5390,7 @@
                 <a:solidFill>
                   <a:srgbClr val="DCE9F7"/>
                 </a:solidFill>
-                <a:latin typeface="Aptos"/>
+                <a:latin typeface="Liberation Sans"/>
               </a:rPr>
               <a:t>Turn repeated rule-heavy work into more consistent and reviewable execution</a:t>
             </a:r>
@@ -5475,7 +5475,7 @@
                 <a:solidFill>
                   <a:srgbClr val="5A6573"/>
                 </a:solidFill>
-                <a:latin typeface="Aptos"/>
+                <a:latin typeface="Liberation Sans"/>
               </a:rPr>
               <a:t>Ray Liu · September 2026</a:t>
             </a:r>
@@ -5517,7 +5517,7 @@
                 <a:solidFill>
                   <a:srgbClr val="5A6573"/>
                 </a:solidFill>
-                <a:latin typeface="Aptos"/>
+                <a:latin typeface="Liberation Sans"/>
               </a:rPr>
               <a:t>2</a:t>
             </a:r>
@@ -5647,7 +5647,7 @@
                 <a:solidFill>
                   <a:srgbClr val="092540"/>
                 </a:solidFill>
-                <a:latin typeface="Aptos"/>
+                <a:latin typeface="Liberation Sans"/>
               </a:rPr>
               <a:t>Repeated configuration work</a:t>
             </a:r>
@@ -5689,7 +5689,7 @@
                 <a:solidFill>
                   <a:srgbClr val="1E293B"/>
                 </a:solidFill>
-                <a:latin typeface="Aptos"/>
+                <a:latin typeface="Liberation Sans"/>
               </a:rPr>
               <a:t>Repeated PLB / pattern / conditional setup</a:t>
             </a:r>
@@ -5708,7 +5708,7 @@
                 <a:solidFill>
                   <a:srgbClr val="1E293B"/>
                 </a:solidFill>
-                <a:latin typeface="Aptos"/>
+                <a:latin typeface="Liberation Sans"/>
               </a:rPr>
               <a:t>Approach: visual or natural-language generation to reduce repeated structuring</a:t>
             </a:r>
@@ -5838,7 +5838,7 @@
                 <a:solidFill>
                   <a:srgbClr val="092540"/>
                 </a:solidFill>
-                <a:latin typeface="Aptos"/>
+                <a:latin typeface="Liberation Sans"/>
               </a:rPr>
               <a:t>Complex rule execution</a:t>
             </a:r>
@@ -5880,7 +5880,7 @@
                 <a:solidFill>
                   <a:srgbClr val="1E293B"/>
                 </a:solidFill>
-                <a:latin typeface="Aptos"/>
+                <a:latin typeface="Liberation Sans"/>
               </a:rPr>
               <a:t>DVS cycle, trigger, and pin rules are detailed and easy to misapply</a:t>
             </a:r>
@@ -5899,7 +5899,7 @@
                 <a:solidFill>
                   <a:srgbClr val="1E293B"/>
                 </a:solidFill>
-                <a:latin typeface="Aptos"/>
+                <a:latin typeface="Liberation Sans"/>
               </a:rPr>
               <a:t>Approach: parameterized processing plus input checks instead of ad hoc edits</a:t>
             </a:r>
@@ -6029,7 +6029,7 @@
                 <a:solidFill>
                   <a:srgbClr val="092540"/>
                 </a:solidFill>
-                <a:latin typeface="Aptos"/>
+                <a:latin typeface="Liberation Sans"/>
               </a:rPr>
               <a:t>Repeated read-only checking</a:t>
             </a:r>
@@ -6071,7 +6071,7 @@
                 <a:solidFill>
                   <a:srgbClr val="1E293B"/>
                 </a:solidFill>
-                <a:latin typeface="Aptos"/>
+                <a:latin typeface="Liberation Sans"/>
               </a:rPr>
               <a:t>Recurring scan-pin extraction and group comparison</a:t>
             </a:r>
@@ -6090,7 +6090,7 @@
                 <a:solidFill>
                   <a:srgbClr val="1E293B"/>
                 </a:solidFill>
-                <a:latin typeface="Aptos"/>
+                <a:latin typeface="Liberation Sans"/>
               </a:rPr>
               <a:t>Approach: structured checks and traceable reporting for review</a:t>
             </a:r>
@@ -6177,7 +6177,7 @@
                 <a:solidFill>
                   <a:srgbClr val="092540"/>
                 </a:solidFill>
-                <a:latin typeface="Aptos"/>
+                <a:latin typeface="Liberation Sans"/>
               </a:rPr>
               <a:t>These are task characteristics, not quantified historical losses; automation supports engineering judgment rather than replacing it.</a:t>
             </a:r>
@@ -6331,7 +6331,7 @@
                 <a:solidFill>
                   <a:srgbClr val="FFFFFF"/>
                 </a:solidFill>
-                <a:latin typeface="Aptos"/>
+                <a:latin typeface="Liberation Sans"/>
               </a:rPr>
               <a:t>Key Deliverables</a:t>
             </a:r>
@@ -6373,7 +6373,7 @@
                 <a:solidFill>
                   <a:srgbClr val="DCE9F7"/>
                 </a:solidFill>
-                <a:latin typeface="Aptos"/>
+                <a:latin typeface="Liberation Sans"/>
               </a:rPr>
               <a:t>Each deliverable separates shipped capability from intended value</a:t>
             </a:r>
@@ -6458,7 +6458,7 @@
                 <a:solidFill>
                   <a:srgbClr val="5A6573"/>
                 </a:solidFill>
-                <a:latin typeface="Aptos"/>
+                <a:latin typeface="Liberation Sans"/>
               </a:rPr>
               <a:t>Ray Liu · September 2026</a:t>
             </a:r>
@@ -6500,7 +6500,7 @@
                 <a:solidFill>
                   <a:srgbClr val="5A6573"/>
                 </a:solidFill>
-                <a:latin typeface="Aptos"/>
+                <a:latin typeface="Liberation Sans"/>
               </a:rPr>
               <a:t>3</a:t>
             </a:r>
@@ -6630,7 +6630,7 @@
                 <a:solidFill>
                   <a:srgbClr val="092540"/>
                 </a:solidFill>
-                <a:latin typeface="Aptos"/>
+                <a:latin typeface="Liberation Sans"/>
               </a:rPr>
               <a:t>A. PCAR3 visual Web UI</a:t>
             </a:r>
@@ -6672,7 +6672,7 @@
                 <a:solidFill>
                   <a:srgbClr val="1E293B"/>
                 </a:solidFill>
-                <a:latin typeface="Aptos"/>
+                <a:latin typeface="Liberation Sans"/>
               </a:rPr>
               <a:t>Delivered: multiple PLBs, Loop Partition, drag/drop ordering, and state persistence</a:t>
             </a:r>
@@ -6691,7 +6691,7 @@
                 <a:solidFill>
                   <a:srgbClr val="1E293B"/>
                 </a:solidFill>
-                <a:latin typeface="Aptos"/>
+                <a:latin typeface="Liberation Sans"/>
               </a:rPr>
               <a:t>Intended value: less manual structuring and less repeated re-entry</a:t>
             </a:r>
@@ -6821,7 +6821,7 @@
                 <a:solidFill>
                   <a:srgbClr val="092540"/>
                 </a:solidFill>
-                <a:latin typeface="Aptos"/>
+                <a:latin typeface="Liberation Sans"/>
               </a:rPr>
               <a:t>B. Natural-language Copilot Skill</a:t>
             </a:r>
@@ -6863,7 +6863,7 @@
                 <a:solidFill>
                   <a:srgbClr val="1E293B"/>
                 </a:solidFill>
-                <a:latin typeface="Aptos"/>
+                <a:latin typeface="Liberation Sans"/>
               </a:rPr>
               <a:t>Delivered: generate .pcar, and optionally resolve patterns, submit builds, poll status, and verify real Pat output</a:t>
             </a:r>
@@ -6882,7 +6882,7 @@
                 <a:solidFill>
                   <a:srgbClr val="1E293B"/>
                 </a:solidFill>
-                <a:latin typeface="Aptos"/>
+                <a:latin typeface="Liberation Sans"/>
               </a:rPr>
               <a:t>Boundary: builds require the right environment and access; code-only generation does not</a:t>
             </a:r>
@@ -7012,7 +7012,7 @@
                 <a:solidFill>
                   <a:srgbClr val="092540"/>
                 </a:solidFill>
-                <a:latin typeface="Aptos"/>
+                <a:latin typeface="Liberation Sans"/>
               </a:rPr>
               <a:t>C. DVS CLI / Skill</a:t>
             </a:r>
@@ -7054,7 +7054,7 @@
                 <a:solidFill>
                   <a:srgbClr val="1E293B"/>
                 </a:solidFill>
-                <a:latin typeface="Aptos"/>
+                <a:latin typeface="Liberation Sans"/>
               </a:rPr>
               <a:t>Delivered: transform the expected 16 trigger blocks, support CCD / IOD / DRD, and handle .stil / .stil.gz</a:t>
             </a:r>
@@ -7073,7 +7073,7 @@
                 <a:solidFill>
                   <a:srgbClr val="1E293B"/>
                 </a:solidFill>
-                <a:latin typeface="Aptos"/>
+                <a:latin typeface="Liberation Sans"/>
               </a:rPr>
               <a:t>Intended value: convert repeated editing into consistent rule-based processing</a:t>
             </a:r>
@@ -7203,7 +7203,7 @@
                 <a:solidFill>
                   <a:srgbClr val="092540"/>
                 </a:solidFill>
-                <a:latin typeface="Aptos"/>
+                <a:latin typeface="Liberation Sans"/>
               </a:rPr>
               <a:t>D. Scan pin CLI / Skill</a:t>
             </a:r>
@@ -7245,7 +7245,7 @@
                 <a:solidFill>
                   <a:srgbClr val="1E293B"/>
                 </a:solidFill>
-                <a:latin typeface="Aptos"/>
+                <a:latin typeface="Liberation Sans"/>
               </a:rPr>
               <a:t>Delivered: extract ScanIn / ScanOut, normalize names, check allowed-group union, and emit JSON with chain names, line numbers, and matches</a:t>
             </a:r>
@@ -7264,7 +7264,7 @@
                 <a:solidFill>
                   <a:srgbClr val="1E293B"/>
                 </a:solidFill>
-                <a:latin typeface="Aptos"/>
+                <a:latin typeface="Liberation Sans"/>
               </a:rPr>
               <a:t>Intended value: produce traceable read-only check results for human review</a:t>
             </a:r>
@@ -7418,7 +7418,7 @@
                 <a:solidFill>
                   <a:srgbClr val="FFFFFF"/>
                 </a:solidFill>
-                <a:latin typeface="Aptos"/>
+                <a:latin typeface="Liberation Sans"/>
               </a:rPr>
               <a:t>Quality and Risk Controls</a:t>
             </a:r>
@@ -7460,7 +7460,7 @@
                 <a:solidFill>
                   <a:srgbClr val="DCE9F7"/>
                 </a:solidFill>
-                <a:latin typeface="Aptos"/>
+                <a:latin typeface="Liberation Sans"/>
               </a:rPr>
               <a:t>Emphasize input protection, artifact checks, and explicit boundaries rather than over-promising</a:t>
             </a:r>
@@ -7545,7 +7545,7 @@
                 <a:solidFill>
                   <a:srgbClr val="5A6573"/>
                 </a:solidFill>
-                <a:latin typeface="Aptos"/>
+                <a:latin typeface="Liberation Sans"/>
               </a:rPr>
               <a:t>Ray Liu · September 2026</a:t>
             </a:r>
@@ -7587,7 +7587,7 @@
                 <a:solidFill>
                   <a:srgbClr val="5A6573"/>
                 </a:solidFill>
-                <a:latin typeface="Aptos"/>
+                <a:latin typeface="Liberation Sans"/>
               </a:rPr>
               <a:t>4</a:t>
             </a:r>
@@ -7717,7 +7717,7 @@
                 <a:solidFill>
                   <a:srgbClr val="092540"/>
                 </a:solidFill>
-                <a:latin typeface="Aptos"/>
+                <a:latin typeface="Liberation Sans"/>
               </a:rPr>
               <a:t>Protect inputs</a:t>
             </a:r>
@@ -7759,7 +7759,7 @@
                 <a:solidFill>
                   <a:srgbClr val="1E293B"/>
                 </a:solidFill>
-                <a:latin typeface="Aptos"/>
+                <a:latin typeface="Liberation Sans"/>
               </a:rPr>
               <a:t>DVS writes a separate output instead of overwriting the source</a:t>
             </a:r>
@@ -7778,7 +7778,7 @@
                 <a:solidFill>
                   <a:srgbClr val="1E293B"/>
                 </a:solidFill>
-                <a:latin typeface="Aptos"/>
+                <a:latin typeface="Liberation Sans"/>
               </a:rPr>
               <a:t>Supports dry-run and rejects malformed, reprocessed, or source-overwriting input</a:t>
             </a:r>
@@ -7908,7 +7908,7 @@
                 <a:solidFill>
                   <a:srgbClr val="092540"/>
                 </a:solidFill>
-                <a:latin typeface="Aptos"/>
+                <a:latin typeface="Liberation Sans"/>
               </a:rPr>
               <a:t>Verify artifacts</a:t>
             </a:r>
@@ -7950,7 +7950,7 @@
                 <a:solidFill>
                   <a:srgbClr val="1E293B"/>
                 </a:solidFill>
-                <a:latin typeface="Aptos"/>
+                <a:latin typeface="Liberation Sans"/>
               </a:rPr>
               <a:t>PList-oriented flow checks for real Pat content, not only a completed job status</a:t>
             </a:r>
@@ -7969,7 +7969,7 @@
                 <a:solidFill>
                   <a:srgbClr val="1E293B"/>
                 </a:solidFill>
-                <a:latin typeface="Aptos"/>
+                <a:latin typeface="Liberation Sans"/>
               </a:rPr>
               <a:t>Scan-pin reports include chain names, line numbers, and matching groups for traceability</a:t>
             </a:r>
@@ -8099,7 +8099,7 @@
                 <a:solidFill>
                   <a:srgbClr val="092540"/>
                 </a:solidFill>
-                <a:latin typeface="Aptos"/>
+                <a:latin typeface="Liberation Sans"/>
               </a:rPr>
               <a:t>State boundaries explicitly</a:t>
             </a:r>
@@ -8141,7 +8141,7 @@
                 <a:solidFill>
                   <a:srgbClr val="1E293B"/>
                 </a:solidFill>
-                <a:latin typeface="Aptos"/>
+                <a:latin typeface="Liberation Sans"/>
               </a:rPr>
               <a:t>A pin PASS means membership in the allowed group union only</a:t>
             </a:r>
@@ -8160,7 +8160,7 @@
                 <a:solidFill>
                   <a:srgbClr val="1E293B"/>
                 </a:solidFill>
-                <a:latin typeface="Aptos"/>
+                <a:latin typeface="Liberation Sans"/>
               </a:rPr>
               <a:t>It does not mean direction, timing, electrical correctness, or tester readiness</a:t>
             </a:r>
@@ -8247,7 +8247,7 @@
                 <a:solidFill>
                   <a:srgbClr val="092540"/>
                 </a:solidFill>
-                <a:latin typeface="Aptos"/>
+                <a:latin typeface="Liberation Sans"/>
               </a:rPr>
               <a:t>No claim of zero defects or production certification; final acceptance and exception handling remain human-owned.</a:t>
             </a:r>
@@ -8401,7 +8401,7 @@
                 <a:solidFill>
                   <a:srgbClr val="FFFFFF"/>
                 </a:solidFill>
-                <a:latin typeface="Aptos"/>
+                <a:latin typeface="Liberation Sans"/>
               </a:rPr>
               <a:t>Business Value and Measurement</a:t>
             </a:r>
@@ -8443,7 +8443,7 @@
                 <a:solidFill>
                   <a:srgbClr val="DCE9F7"/>
                 </a:solidFill>
-                <a:latin typeface="Aptos"/>
+                <a:latin typeface="Liberation Sans"/>
               </a:rPr>
               <a:t>Define the measurement method first, then decide whether the tools justify broader rollout</a:t>
             </a:r>
@@ -8528,7 +8528,7 @@
                 <a:solidFill>
                   <a:srgbClr val="5A6573"/>
                 </a:solidFill>
-                <a:latin typeface="Aptos"/>
+                <a:latin typeface="Liberation Sans"/>
               </a:rPr>
               <a:t>Ray Liu · September 2026</a:t>
             </a:r>
@@ -8570,7 +8570,7 @@
                 <a:solidFill>
                   <a:srgbClr val="5A6573"/>
                 </a:solidFill>
-                <a:latin typeface="Aptos"/>
+                <a:latin typeface="Liberation Sans"/>
               </a:rPr>
               <a:t>5</a:t>
             </a:r>
@@ -8612,7 +8612,7 @@
                           <a:solidFill>
                             <a:srgbClr val="FFFFFF"/>
                           </a:solidFill>
-                          <a:latin typeface="Aptos"/>
+                          <a:latin typeface="Liberation Sans"/>
                         </a:rPr>
                         <a:t>Dimension</a:t>
                       </a:r>
@@ -8635,7 +8635,7 @@
                           <a:solidFill>
                             <a:srgbClr val="FFFFFF"/>
                           </a:solidFill>
-                          <a:latin typeface="Aptos"/>
+                          <a:latin typeface="Liberation Sans"/>
                         </a:rPr>
                         <a:t>Suggested metric</a:t>
                       </a:r>
@@ -8658,7 +8658,7 @@
                           <a:solidFill>
                             <a:srgbClr val="FFFFFF"/>
                           </a:solidFill>
-                          <a:latin typeface="Aptos"/>
+                          <a:latin typeface="Liberation Sans"/>
                         </a:rPr>
                         <a:t>How to evaluate</a:t>
                       </a:r>
@@ -8683,7 +8683,7 @@
                           <a:solidFill>
                             <a:srgbClr val="1E293B"/>
                           </a:solidFill>
-                          <a:latin typeface="Aptos"/>
+                          <a:latin typeface="Liberation Sans"/>
                         </a:rPr>
                         <a:t>Efficiency</a:t>
                       </a:r>
@@ -8706,7 +8706,7 @@
                           <a:solidFill>
                             <a:srgbClr val="1E293B"/>
                           </a:solidFill>
-                          <a:latin typeface="Aptos"/>
+                          <a:latin typeface="Liberation Sans"/>
                         </a:rPr>
                         <a:t>Hands-on time for comparable tasks</a:t>
                       </a:r>
@@ -8729,7 +8729,7 @@
                           <a:solidFill>
                             <a:srgbClr val="1E293B"/>
                           </a:solidFill>
-                          <a:latin typeface="Aptos"/>
+                          <a:latin typeface="Liberation Sans"/>
                         </a:rPr>
                         <a:t>Compare equivalent manual and tool-assisted workflows, including preparation, review, and correction; record machine wait separately</a:t>
                       </a:r>
@@ -8754,7 +8754,7 @@
                           <a:solidFill>
                             <a:srgbClr val="1E293B"/>
                           </a:solidFill>
-                          <a:latin typeface="Aptos"/>
+                          <a:latin typeface="Liberation Sans"/>
                         </a:rPr>
                         <a:t>Quality</a:t>
                       </a:r>
@@ -8777,7 +8777,7 @@
                           <a:solidFill>
                             <a:srgbClr val="1E293B"/>
                           </a:solidFill>
-                          <a:latin typeface="Aptos"/>
+                          <a:latin typeface="Liberation Sans"/>
                         </a:rPr>
                         <a:t>Rework and review findings</a:t>
                       </a:r>
@@ -8800,7 +8800,7 @@
                           <a:solidFill>
                             <a:srgbClr val="1E293B"/>
                           </a:solidFill>
-                          <a:latin typeface="Aptos"/>
+                          <a:latin typeface="Liberation Sans"/>
                         </a:rPr>
                         <a:t>Track misses, false alarms, and correction causes rather than only whether generation succeeded</a:t>
                       </a:r>
@@ -8825,7 +8825,7 @@
                           <a:solidFill>
                             <a:srgbClr val="1E293B"/>
                           </a:solidFill>
-                          <a:latin typeface="Aptos"/>
+                          <a:latin typeface="Liberation Sans"/>
                         </a:rPr>
                         <a:t>Adoption</a:t>
                       </a:r>
@@ -8848,7 +8848,7 @@
                           <a:solidFill>
                             <a:srgbClr val="1E293B"/>
                           </a:solidFill>
-                          <a:latin typeface="Aptos"/>
+                          <a:latin typeface="Liberation Sans"/>
                         </a:rPr>
                         <a:t>Actual usage and users</a:t>
                       </a:r>
@@ -8871,7 +8871,7 @@
                           <a:solidFill>
                             <a:srgbClr val="1E293B"/>
                           </a:solidFill>
-                          <a:latin typeface="Aptos"/>
+                          <a:latin typeface="Liberation Sans"/>
                         </a:rPr>
                         <a:t>Separate author usage from independent team usage before claiming broader value</a:t>
                       </a:r>
@@ -8896,7 +8896,7 @@
                           <a:solidFill>
                             <a:srgbClr val="1E293B"/>
                           </a:solidFill>
-                          <a:latin typeface="Aptos"/>
+                          <a:latin typeface="Liberation Sans"/>
                         </a:rPr>
                         <a:t>Cost</a:t>
                       </a:r>
@@ -8919,7 +8919,7 @@
                           <a:solidFill>
                             <a:srgbClr val="1E293B"/>
                           </a:solidFill>
-                          <a:latin typeface="Aptos"/>
+                          <a:latin typeface="Liberation Sans"/>
                         </a:rPr>
                         <a:t>Maintenance, training, and review effort</a:t>
                       </a:r>
@@ -8942,7 +8942,7 @@
                           <a:solidFill>
                             <a:srgbClr val="1E293B"/>
                           </a:solidFill>
-                          <a:latin typeface="Aptos"/>
+                          <a:latin typeface="Liberation Sans"/>
                         </a:rPr>
                         <a:t>Assess support cost alongside any savings to judge net value</a:t>
                       </a:r>
@@ -9039,7 +9039,7 @@
                 <a:solidFill>
                   <a:srgbClr val="092540"/>
                 </a:solidFill>
-                <a:latin typeface="Aptos"/>
+                <a:latin typeface="Liberation Sans"/>
               </a:rPr>
               <a:t>No measured hours saved, percentage improvement, or ROI is claimed yet.</a:t>
             </a:r>
@@ -9193,7 +9193,7 @@
                 <a:solidFill>
                   <a:srgbClr val="FFFFFF"/>
                 </a:solidFill>
-                <a:latin typeface="Aptos"/>
+                <a:latin typeface="Liberation Sans"/>
               </a:rPr>
               <a:t>Next Steps and Support Needed</a:t>
             </a:r>
@@ -9235,7 +9235,7 @@
                 <a:solidFill>
                   <a:srgbClr val="DCE9F7"/>
                 </a:solidFill>
-                <a:latin typeface="Aptos"/>
+                <a:latin typeface="Liberation Sans"/>
               </a:rPr>
               <a:t>Proposed small-scope pilot plan: validate first, then expand</a:t>
             </a:r>
@@ -9320,7 +9320,7 @@
                 <a:solidFill>
                   <a:srgbClr val="5A6573"/>
                 </a:solidFill>
-                <a:latin typeface="Aptos"/>
+                <a:latin typeface="Liberation Sans"/>
               </a:rPr>
               <a:t>Ray Liu · September 2026</a:t>
             </a:r>
@@ -9362,7 +9362,7 @@
                 <a:solidFill>
                   <a:srgbClr val="5A6573"/>
                 </a:solidFill>
-                <a:latin typeface="Aptos"/>
+                <a:latin typeface="Liberation Sans"/>
               </a:rPr>
               <a:t>6</a:t>
             </a:r>
@@ -9492,7 +9492,7 @@
                 <a:solidFill>
                   <a:srgbClr val="092540"/>
                 </a:solidFill>
-                <a:latin typeface="Aptos"/>
+                <a:latin typeface="Liberation Sans"/>
               </a:rPr>
               <a:t>Proposed pilot steps</a:t>
             </a:r>
@@ -9534,7 +9534,7 @@
                 <a:solidFill>
                   <a:srgbClr val="1E293B"/>
                 </a:solidFill>
-                <a:latin typeface="Aptos"/>
+                <a:latin typeface="Liberation Sans"/>
               </a:rPr>
               <a:t>Select stable-rule, high-frequency pilot tasks and name both pilot and acceptance owners</a:t>
             </a:r>
@@ -9553,7 +9553,7 @@
                 <a:solidFill>
                   <a:srgbClr val="1E293B"/>
                 </a:solidFill>
-                <a:latin typeface="Aptos"/>
+                <a:latin typeface="Liberation Sans"/>
               </a:rPr>
               <a:t>Use approved synthetic or sanitized examples instead of proprietary customer data</a:t>
             </a:r>
@@ -9572,7 +9572,7 @@
                 <a:solidFill>
                   <a:srgbClr val="1E293B"/>
                 </a:solidFill>
-                <a:latin typeface="Aptos"/>
+                <a:latin typeface="Liberation Sans"/>
               </a:rPr>
               <a:t>Establish a manual/tool baseline plus exception, review, and rework records</a:t>
             </a:r>
@@ -9591,7 +9591,7 @@
                 <a:solidFill>
                   <a:srgbClr val="1E293B"/>
                 </a:solidFill>
-                <a:latin typeface="Aptos"/>
+                <a:latin typeface="Liberation Sans"/>
               </a:rPr>
               <a:t>Evaluate efficiency, quality, and maintenance against agreed acceptance criteria before expanding</a:t>
             </a:r>
@@ -9721,7 +9721,7 @@
                 <a:solidFill>
                   <a:srgbClr val="092540"/>
                 </a:solidFill>
-                <a:latin typeface="Aptos"/>
+                <a:latin typeface="Liberation Sans"/>
               </a:rPr>
               <a:t>Support requested</a:t>
             </a:r>
@@ -9763,7 +9763,7 @@
                 <a:solidFill>
                   <a:srgbClr val="1E293B"/>
                 </a:solidFill>
-                <a:latin typeface="Aptos"/>
+                <a:latin typeface="Liberation Sans"/>
               </a:rPr>
               <a:t>Confirm pilot participants and business contacts</a:t>
             </a:r>
@@ -9782,7 +9782,7 @@
                 <a:solidFill>
                   <a:srgbClr val="1E293B"/>
                 </a:solidFill>
-                <a:latin typeface="Aptos"/>
+                <a:latin typeface="Liberation Sans"/>
               </a:rPr>
               <a:t>Approve the example scope that can be used for demonstration and validation</a:t>
             </a:r>
@@ -9801,7 +9801,7 @@
                 <a:solidFill>
                   <a:srgbClr val="1E293B"/>
                 </a:solidFill>
-                <a:latin typeface="Aptos"/>
+                <a:latin typeface="Liberation Sans"/>
               </a:rPr>
               <a:t>Schedule a results review to decide whether a next phase is justified</a:t>
             </a:r>
@@ -9820,7 +9820,7 @@
                 <a:solidFill>
                   <a:srgbClr val="1E293B"/>
                 </a:solidFill>
-                <a:latin typeface="Aptos"/>
+                <a:latin typeface="Liberation Sans"/>
               </a:rPr>
               <a:t>Agree which conclusions require independent team validation before expansion</a:t>
             </a:r>
@@ -9907,7 +9907,7 @@
                 <a:solidFill>
                   <a:srgbClr val="092540"/>
                 </a:solidFill>
-                <a:latin typeface="Aptos"/>
+                <a:latin typeface="Liberation Sans"/>
               </a:rPr>
               <a:t>This is a proposed plan, not an approved rollout; expansion should follow pilot results and agreed acceptance criteria.</a:t>
             </a:r>
